--- a/Connexa_Proposta_do_Projeto.pptx
+++ b/Connexa_Proposta_do_Projeto.pptx
@@ -2194,9 +2194,10 @@
           <a:lstStyle/>
           <a:p>
             <a:r>
-              <a:rPr lang="en-US" dirty="0"/>
-              <a:t>Confirmar o número de cada equipe antes de qualquer criação de repositório ou organização.</a:t>
-            </a:r>
+              <a:rPr lang="pt-BR"/>
+              <a:t>Pedir que cada equipe registre o próprio nome e o da organização antes de qualquer criação.</a:t>
+            </a:r>
+            <a:endParaRPr lang="en-US" dirty="0"/>
           </a:p>
         </p:txBody>
       </p:sp>
@@ -2368,9 +2369,10 @@
           <a:lstStyle/>
           <a:p>
             <a:r>
-              <a:rPr lang="en-US" dirty="0"/>
-              <a:t>Conta pessoal cria problema de acesso na avaliação e não é aceita. Resolver o bloqueio institucional antes de prosseguir.</a:t>
-            </a:r>
+              <a:rPr lang="pt-BR"/>
+              <a:t>Organização criada com conta pessoal não fica ligada ao Microsoft Entra ID e impede, na Atividade de Sprint, a conexão do agente de IA com o Azure Boards. Resolver o bloqueio institucional antes de prosseguir.</a:t>
+            </a:r>
+            <a:endParaRPr lang="en-US" dirty="0"/>
           </a:p>
         </p:txBody>
       </p:sp>
@@ -2716,9 +2718,10 @@
           <a:lstStyle/>
           <a:p>
             <a:r>
-              <a:rPr lang="en-US" dirty="0"/>
-              <a:t>Sem esse vínculo, a cadeia de rastreabilidade da Etapa 2 fica quebrada e a entrega perde no critério correspondente.</a:t>
-            </a:r>
+              <a:rPr lang="pt-BR"/>
+              <a:t>Sem esse vínculo, a cadeia de rastreabilidade fica quebrada. Nesta etapa basta apresentar o conceito: a configuração é feita na Atividade de Sprint.</a:t>
+            </a:r>
+            <a:endParaRPr lang="en-US" dirty="0"/>
           </a:p>
         </p:txBody>
       </p:sp>
@@ -16825,7 +16828,7 @@
               <a:buNone/>
             </a:pPr>
             <a:r>
-              <a:rPr lang="en-US" sz="1400" dirty="0">
+              <a:rPr lang="pt-BR" sz="1400">
                 <a:solidFill>
                   <a:srgbClr val="5A7184"/>
                 </a:solidFill>
@@ -16833,7 +16836,7 @@
                 <a:ea typeface="Calibri" pitchFamily="34" charset="-122"/>
                 <a:cs typeface="Calibri" pitchFamily="34" charset="-120"/>
               </a:rPr>
-              <a:t>Padrão obrigatório para que a avaliação encontre os artefatos</a:t>
+              <a:t>A equipe escolhe os nomes; só o nome do projeto é fixo</a:t>
             </a:r>
             <a:endParaRPr lang="en-US" sz="1400" dirty="0"/>
           </a:p>
@@ -16893,7 +16896,7 @@
               <a:buNone/>
             </a:pPr>
             <a:r>
-              <a:rPr lang="en-US" sz="1250" b="1" dirty="0">
+              <a:rPr lang="en-US" sz="1250" b="1">
                 <a:solidFill>
                   <a:srgbClr val="02C39A"/>
                 </a:solidFill>
@@ -16901,7 +16904,7 @@
                 <a:ea typeface="Calibri" pitchFamily="34" charset="-122"/>
                 <a:cs typeface="Calibri" pitchFamily="34" charset="-120"/>
               </a:rPr>
-              <a:t>Padrão de nomes</a:t>
+              <a:t>Nomes da equipe</a:t>
             </a:r>
             <a:endParaRPr lang="en-US" sz="1250" dirty="0"/>
           </a:p>
@@ -16944,7 +16947,7 @@
 </a:t>
             </a:r>
             <a:r>
-              <a:rPr lang="en-US" sz="1000" dirty="0">
+              <a:rPr lang="en-US" sz="1000">
                 <a:solidFill>
                   <a:srgbClr val="FFFFFF"/>
                 </a:solidFill>
@@ -16952,45 +16955,42 @@
                 <a:ea typeface="Consolas" pitchFamily="34" charset="-122"/>
                 <a:cs typeface="Consolas" pitchFamily="34" charset="-120"/>
               </a:rPr>
-              <a:t>  Equipe NN          (NN com dois dígitos)
-</a:t>
+              <a:t>  &lt;nome-da-equipe&gt;</a:t>
             </a:r>
             <a:r>
               <a:rPr lang="en-US" sz="1000" dirty="0">
                 <a:solidFill>
-                  <a:srgbClr val="02C39A"/>
+                  <a:srgbClr val="FFFFFF"/>
                 </a:solidFill>
                 <a:latin typeface="Consolas" pitchFamily="34" charset="0"/>
                 <a:ea typeface="Consolas" pitchFamily="34" charset="-122"/>
                 <a:cs typeface="Consolas" pitchFamily="34" charset="-120"/>
               </a:rPr>
-              <a:t>GitHub
+              <a:t>
 </a:t>
             </a:r>
             <a:r>
               <a:rPr lang="en-US" sz="1000" dirty="0">
                 <a:solidFill>
-                  <a:srgbClr val="FFFFFF"/>
+                  <a:srgbClr val="02C39A"/>
                 </a:solidFill>
                 <a:latin typeface="Consolas" pitchFamily="34" charset="0"/>
                 <a:ea typeface="Consolas" pitchFamily="34" charset="-122"/>
                 <a:cs typeface="Consolas" pitchFamily="34" charset="-120"/>
               </a:rPr>
-              <a:t>  &lt;organizacao-da-disciplina&gt;/
-    connexa-equipe-NN
+              <a:t>GitHub
 </a:t>
             </a:r>
             <a:r>
-              <a:rPr lang="en-US" sz="1000" dirty="0">
-                <a:solidFill>
-                  <a:srgbClr val="02C39A"/>
+              <a:rPr lang="en-US" sz="1000">
+                <a:solidFill>
+                  <a:srgbClr val="FFFFFF"/>
                 </a:solidFill>
                 <a:latin typeface="Consolas" pitchFamily="34" charset="0"/>
                 <a:ea typeface="Consolas" pitchFamily="34" charset="-122"/>
                 <a:cs typeface="Consolas" pitchFamily="34" charset="-120"/>
               </a:rPr>
-              <a:t>Azure DevOps
-</a:t>
+              <a:t>  &lt;organizacao-github&gt;/</a:t>
             </a:r>
             <a:r>
               <a:rPr lang="en-US" sz="1000" dirty="0">
@@ -17001,21 +17001,19 @@
                 <a:ea typeface="Consolas" pitchFamily="34" charset="-122"/>
                 <a:cs typeface="Consolas" pitchFamily="34" charset="-120"/>
               </a:rPr>
-              <a:t>  Organização  engsoft-&lt;turma&gt;-equipe-NN
-  Projeto      Connexa
+              <a:t>
 </a:t>
             </a:r>
             <a:r>
-              <a:rPr lang="en-US" sz="1000" dirty="0">
-                <a:solidFill>
-                  <a:srgbClr val="02C39A"/>
+              <a:rPr lang="en-US" sz="1000">
+                <a:solidFill>
+                  <a:srgbClr val="FFFFFF"/>
                 </a:solidFill>
                 <a:latin typeface="Consolas" pitchFamily="34" charset="0"/>
                 <a:ea typeface="Consolas" pitchFamily="34" charset="-122"/>
                 <a:cs typeface="Consolas" pitchFamily="34" charset="-120"/>
               </a:rPr>
-              <a:t>Trabalho
-</a:t>
+              <a:t>    &lt;repositorio-da-equipe&gt;   (Atividade de Sprint)</a:t>
             </a:r>
             <a:r>
               <a:rPr lang="en-US" sz="1000" dirty="0">
@@ -17026,37 +17024,163 @@
                 <a:ea typeface="Consolas" pitchFamily="34" charset="-122"/>
                 <a:cs typeface="Consolas" pitchFamily="34" charset="-120"/>
               </a:rPr>
-              <a:t>  Branch   feature/1234-descricao-curta
-  Release  v0.1.0
+              <a:t>
 </a:t>
             </a:r>
             <a:r>
-              <a:rPr lang="en-US" sz="900" dirty="0">
-                <a:solidFill>
-                  <a:srgbClr val="8FA6B8"/>
+              <a:rPr lang="en-US" sz="1000" dirty="0">
+                <a:solidFill>
+                  <a:srgbClr val="02C39A"/>
                 </a:solidFill>
                 <a:latin typeface="Consolas" pitchFamily="34" charset="0"/>
                 <a:ea typeface="Consolas" pitchFamily="34" charset="-122"/>
                 <a:cs typeface="Consolas" pitchFamily="34" charset="-120"/>
               </a:rPr>
-              <a:t>Os valores entre &lt; &gt; são definidos pelo</a:t>
-            </a:r>
-            <a:endParaRPr lang="en-US" sz="1000" dirty="0"/>
-          </a:p>
-          <a:p>
-            <a:pPr marL="0" indent="0">
-              <a:buNone/>
-            </a:pPr>
-            <a:r>
-              <a:rPr lang="en-US" sz="900" dirty="0">
-                <a:solidFill>
-                  <a:srgbClr val="8FA6B8"/>
+              <a:t>Azure DevOps
+</a:t>
+            </a:r>
+            <a:r>
+              <a:rPr lang="en-US" sz="1000" dirty="0">
+                <a:solidFill>
+                  <a:srgbClr val="FFFFFF"/>
                 </a:solidFill>
                 <a:latin typeface="Consolas" pitchFamily="34" charset="0"/>
                 <a:ea typeface="Consolas" pitchFamily="34" charset="-122"/>
                 <a:cs typeface="Consolas" pitchFamily="34" charset="-120"/>
               </a:rPr>
-              <a:t>docente na primeira aula.</a:t>
+              <a:t>  </a:t>
+            </a:r>
+            <a:r>
+              <a:rPr lang="en-US" sz="1000">
+                <a:solidFill>
+                  <a:srgbClr val="FFFFFF"/>
+                </a:solidFill>
+                <a:latin typeface="Consolas" pitchFamily="34" charset="0"/>
+                <a:ea typeface="Consolas" pitchFamily="34" charset="-122"/>
+                <a:cs typeface="Consolas" pitchFamily="34" charset="-120"/>
+              </a:rPr>
+              <a:t>Organização  &lt;organizacao-azure-devops&gt;</a:t>
+            </a:r>
+            <a:r>
+              <a:rPr lang="en-US" sz="1000" dirty="0">
+                <a:solidFill>
+                  <a:srgbClr val="FFFFFF"/>
+                </a:solidFill>
+                <a:latin typeface="Consolas" pitchFamily="34" charset="0"/>
+                <a:ea typeface="Consolas" pitchFamily="34" charset="-122"/>
+                <a:cs typeface="Consolas" pitchFamily="34" charset="-120"/>
+              </a:rPr>
+              <a:t>
+</a:t>
+            </a:r>
+            <a:r>
+              <a:rPr lang="en-US" sz="1000">
+                <a:solidFill>
+                  <a:srgbClr val="FFFFFF"/>
+                </a:solidFill>
+                <a:latin typeface="Consolas" pitchFamily="34" charset="0"/>
+                <a:ea typeface="Consolas" pitchFamily="34" charset="-122"/>
+                <a:cs typeface="Consolas" pitchFamily="34" charset="-120"/>
+              </a:rPr>
+              <a:t>  Projeto      Connexa   (obrigatório)</a:t>
+            </a:r>
+            <a:r>
+              <a:rPr lang="en-US" sz="1000" dirty="0">
+                <a:solidFill>
+                  <a:srgbClr val="FFFFFF"/>
+                </a:solidFill>
+                <a:latin typeface="Consolas" pitchFamily="34" charset="0"/>
+                <a:ea typeface="Consolas" pitchFamily="34" charset="-122"/>
+                <a:cs typeface="Consolas" pitchFamily="34" charset="-120"/>
+              </a:rPr>
+              <a:t>
+</a:t>
+            </a:r>
+            <a:r>
+              <a:rPr lang="en-US" sz="1000" dirty="0">
+                <a:solidFill>
+                  <a:srgbClr val="02C39A"/>
+                </a:solidFill>
+                <a:latin typeface="Consolas" pitchFamily="34" charset="0"/>
+                <a:ea typeface="Consolas" pitchFamily="34" charset="-122"/>
+                <a:cs typeface="Consolas" pitchFamily="34" charset="-120"/>
+              </a:rPr>
+              <a:t>Trabalho
+</a:t>
+            </a:r>
+            <a:r>
+              <a:rPr lang="en-US" sz="1000" dirty="0">
+                <a:solidFill>
+                  <a:srgbClr val="FFFFFF"/>
+                </a:solidFill>
+                <a:latin typeface="Consolas" pitchFamily="34" charset="0"/>
+                <a:ea typeface="Consolas" pitchFamily="34" charset="-122"/>
+                <a:cs typeface="Consolas" pitchFamily="34" charset="-120"/>
+              </a:rPr>
+              <a:t>  </a:t>
+            </a:r>
+            <a:r>
+              <a:rPr lang="en-US" sz="1000">
+                <a:solidFill>
+                  <a:srgbClr val="FFFFFF"/>
+                </a:solidFill>
+                <a:latin typeface="Consolas" pitchFamily="34" charset="0"/>
+                <a:ea typeface="Consolas" pitchFamily="34" charset="-122"/>
+                <a:cs typeface="Consolas" pitchFamily="34" charset="-120"/>
+              </a:rPr>
+              <a:t>Branch   feat/AB1234-descricao-curta</a:t>
+            </a:r>
+            <a:r>
+              <a:rPr lang="en-US" sz="1000" dirty="0">
+                <a:solidFill>
+                  <a:srgbClr val="FFFFFF"/>
+                </a:solidFill>
+                <a:latin typeface="Consolas" pitchFamily="34" charset="0"/>
+                <a:ea typeface="Consolas" pitchFamily="34" charset="-122"/>
+                <a:cs typeface="Consolas" pitchFamily="34" charset="-120"/>
+              </a:rPr>
+              <a:t>
+  Release  v0.1.0
+</a:t>
+            </a:r>
+            <a:r>
+              <a:rPr lang="en-US" sz="900" dirty="0">
+                <a:solidFill>
+                  <a:srgbClr val="8FA6B8"/>
+                </a:solidFill>
+                <a:latin typeface="Consolas" pitchFamily="34" charset="0"/>
+                <a:ea typeface="Consolas" pitchFamily="34" charset="-122"/>
+                <a:cs typeface="Consolas" pitchFamily="34" charset="-120"/>
+              </a:rPr>
+              <a:t>Os valores entre &lt; </a:t>
+            </a:r>
+            <a:r>
+              <a:rPr lang="en-US" sz="900">
+                <a:solidFill>
+                  <a:srgbClr val="8FA6B8"/>
+                </a:solidFill>
+                <a:latin typeface="Consolas" pitchFamily="34" charset="0"/>
+                <a:ea typeface="Consolas" pitchFamily="34" charset="-122"/>
+                <a:cs typeface="Consolas" pitchFamily="34" charset="-120"/>
+              </a:rPr>
+              <a:t>&gt; são escolhidos pela</a:t>
+            </a:r>
+            <a:endParaRPr lang="en-US" sz="1000" dirty="0"/>
+          </a:p>
+          <a:p>
+            <a:pPr marL="0" indent="0">
+              <a:buNone/>
+            </a:pPr>
+            <a:r>
+              <a:rPr lang="pt-BR" sz="900">
+                <a:solidFill>
+                  <a:srgbClr val="8FA6B8"/>
+                </a:solidFill>
+                <a:latin typeface="Consolas" pitchFamily="34" charset="0"/>
+                <a:ea typeface="Consolas" pitchFamily="34" charset="-122"/>
+                <a:cs typeface="Consolas" pitchFamily="34" charset="-120"/>
+              </a:rPr>
+              <a:t>equipe; só o projeto tem nome fixo.</a:t>
             </a:r>
             <a:endParaRPr lang="en-US" sz="1000" dirty="0"/>
           </a:p>
@@ -17121,7 +17245,7 @@
               <a:buNone/>
             </a:pPr>
             <a:r>
-              <a:rPr lang="en-US" sz="1250" b="1" dirty="0">
+              <a:rPr lang="en-US" sz="1250" b="1">
                 <a:solidFill>
                   <a:srgbClr val="065A82"/>
                 </a:solidFill>
@@ -17129,7 +17253,7 @@
                 <a:ea typeface="Calibri" pitchFamily="34" charset="-122"/>
                 <a:cs typeface="Calibri" pitchFamily="34" charset="-120"/>
               </a:rPr>
-              <a:t>Por que o padrão importa</a:t>
+              <a:t>Como escolher os nomes</a:t>
             </a:r>
             <a:endParaRPr lang="en-US" sz="1250" dirty="0"/>
           </a:p>
@@ -17164,7 +17288,7 @@
               <a:buChar char="•"/>
             </a:pPr>
             <a:r>
-              <a:rPr lang="en-US" sz="1100" dirty="0">
+              <a:rPr lang="pt-BR" sz="1100">
                 <a:solidFill>
                   <a:srgbClr val="334155"/>
                 </a:solidFill>
@@ -17172,7 +17296,7 @@
                 <a:ea typeface="Calibri" pitchFamily="34" charset="-122"/>
                 <a:cs typeface="Calibri" pitchFamily="34" charset="-120"/>
               </a:rPr>
-              <a:t>A avaliação percorre os artefatos de forma automatizada; nome fora do padrão não é encontrado</a:t>
+              <a:t>Prefira nomes curtos, sem acentos nem espaços: eles aparecem em endereços e arquivos de configuração</a:t>
             </a:r>
             <a:endParaRPr lang="en-US" sz="1100" dirty="0"/>
           </a:p>
@@ -17185,7 +17309,7 @@
               <a:buChar char="•"/>
             </a:pPr>
             <a:r>
-              <a:rPr lang="en-US" sz="1100" dirty="0">
+              <a:rPr lang="pt-BR" sz="1100">
                 <a:solidFill>
                   <a:srgbClr val="334155"/>
                 </a:solidFill>
@@ -17193,7 +17317,7 @@
                 <a:ea typeface="Calibri" pitchFamily="34" charset="-122"/>
                 <a:cs typeface="Calibri" pitchFamily="34" charset="-120"/>
               </a:rPr>
-              <a:t>connexa-equipe-4 não é o mesmo que connexa-equipe-04</a:t>
+              <a:t>Depois de criado, o nome não muda: links, conexões e configurações dependem dele</a:t>
             </a:r>
             <a:endParaRPr lang="en-US" sz="1100" dirty="0"/>
           </a:p>
@@ -17206,7 +17330,7 @@
               <a:buChar char="•"/>
             </a:pPr>
             <a:r>
-              <a:rPr lang="en-US" sz="1100" dirty="0">
+              <a:rPr lang="pt-BR" sz="1100">
                 <a:solidFill>
                   <a:srgbClr val="334155"/>
                 </a:solidFill>
@@ -17214,7 +17338,7 @@
                 <a:ea typeface="Calibri" pitchFamily="34" charset="-122"/>
                 <a:cs typeface="Calibri" pitchFamily="34" charset="-120"/>
               </a:rPr>
-              <a:t>O número da equipe e os valores entre &lt; &gt; são informados pelo docente na primeira aula</a:t>
+              <a:t>Informe o nome da equipe e os das organizações no post de cada entrega no Teams</a:t>
             </a:r>
             <a:endParaRPr lang="en-US" sz="1100" dirty="0"/>
           </a:p>
@@ -17227,7 +17351,7 @@
               <a:buChar char="•"/>
             </a:pPr>
             <a:r>
-              <a:rPr lang="en-US" sz="1100" dirty="0">
+              <a:rPr lang="pt-BR" sz="1100">
                 <a:solidFill>
                   <a:srgbClr val="334155"/>
                 </a:solidFill>
@@ -17235,7 +17359,7 @@
                 <a:ea typeface="Calibri" pitchFamily="34" charset="-122"/>
                 <a:cs typeface="Calibri" pitchFamily="34" charset="-120"/>
               </a:rPr>
-              <a:t>A nomenclatura é a mesma em qualquer instituição que adote o material</a:t>
+              <a:t>O projeto no Azure DevOps chama-se exatamente Connexa em todas as equipes</a:t>
             </a:r>
             <a:endParaRPr lang="en-US" sz="1100" dirty="0"/>
           </a:p>
@@ -17949,7 +18073,7 @@
               <a:buNone/>
             </a:pPr>
             <a:r>
-              <a:rPr lang="en-US" sz="1050" dirty="0">
+              <a:rPr lang="pt-BR" sz="1050">
                 <a:solidFill>
                   <a:srgbClr val="5A7184"/>
                 </a:solidFill>
@@ -17957,7 +18081,7 @@
                 <a:ea typeface="Calibri" pitchFamily="34" charset="-122"/>
                 <a:cs typeface="Calibri" pitchFamily="34" charset="-120"/>
               </a:rPr>
-              <a:t>Usar o e-mail institucional do integrante que criará a organização</a:t>
+              <a:t>Com o e-mail institucional, a organização fica ligada ao Microsoft Entra ID da instituição</a:t>
             </a:r>
             <a:endParaRPr lang="en-US" sz="1050" dirty="0"/>
           </a:p>
@@ -18129,7 +18253,7 @@
               <a:buNone/>
             </a:pPr>
             <a:r>
-              <a:rPr lang="en-US" sz="1050" dirty="0">
+              <a:rPr lang="pt-BR" sz="1050">
                 <a:solidFill>
                   <a:srgbClr val="5A7184"/>
                 </a:solidFill>
@@ -18137,7 +18261,7 @@
                 <a:ea typeface="Calibri" pitchFamily="34" charset="-122"/>
                 <a:cs typeface="Calibri" pitchFamily="34" charset="-120"/>
               </a:rPr>
-              <a:t>Nomear como engsoft-&lt;turma&gt;-equipe-NN, com o número atribuído à equipe</a:t>
+              <a:t>Usar o nome escolhido pela equipe; ele aparece nos endereços e não muda depois</a:t>
             </a:r>
             <a:endParaRPr lang="en-US" sz="1050" dirty="0"/>
           </a:p>
@@ -18662,7 +18786,7 @@
               <a:buNone/>
             </a:pPr>
             <a:r>
-              <a:rPr lang="en-US" sz="1050" dirty="0">
+              <a:rPr lang="pt-BR" sz="1050">
                 <a:solidFill>
                   <a:srgbClr val="FFFFFF"/>
                 </a:solidFill>
@@ -18670,7 +18794,7 @@
                 <a:ea typeface="Calibri" pitchFamily="34" charset="-122"/>
                 <a:cs typeface="Calibri" pitchFamily="34" charset="-120"/>
               </a:rPr>
-              <a:t>O plano gratuito comporta equipes deste tamanho; confirme o limite vigente.</a:t>
+              <a:t>O plano gratuito inclui cinco usuários Basic: integrantes com Basic e o docente como Stakeholder.</a:t>
             </a:r>
             <a:endParaRPr lang="en-US" sz="1050" dirty="0"/>
           </a:p>
@@ -18980,7 +19104,7 @@
               <a:buNone/>
             </a:pPr>
             <a:r>
-              <a:rPr lang="en-US" sz="1050" dirty="0">
+              <a:rPr lang="pt-BR" sz="1050">
                 <a:solidFill>
                   <a:srgbClr val="5A7184"/>
                 </a:solidFill>
@@ -18988,7 +19112,7 @@
                 <a:ea typeface="Calibri" pitchFamily="34" charset="-122"/>
                 <a:cs typeface="Calibri" pitchFamily="34" charset="-120"/>
               </a:rPr>
-              <a:t>Usar Connexa; o número da equipe já está no nome da organização</a:t>
+              <a:t>Usar exatamente Connexa, em todas as equipes; a organização já identifica a equipe</a:t>
             </a:r>
             <a:endParaRPr lang="en-US" sz="1050" dirty="0"/>
           </a:p>
@@ -19160,7 +19284,7 @@
               <a:buNone/>
             </a:pPr>
             <a:r>
-              <a:rPr lang="en-US" sz="1050" dirty="0">
+              <a:rPr lang="pt-BR" sz="1050">
                 <a:solidFill>
                   <a:srgbClr val="5A7184"/>
                 </a:solidFill>
@@ -19168,7 +19292,7 @@
                 <a:ea typeface="Calibri" pitchFamily="34" charset="-122"/>
                 <a:cs typeface="Calibri" pitchFamily="34" charset="-120"/>
               </a:rPr>
-              <a:t>Manter privado e adicionar o docente como membro, para fins de avaliação</a:t>
+              <a:t>Manter privado e adicionar o docente como membro, com acesso Stakeholder</a:t>
             </a:r>
             <a:endParaRPr lang="en-US" sz="1050" dirty="0"/>
           </a:p>
@@ -22205,7 +22329,7 @@
               <a:buNone/>
             </a:pPr>
             <a:r>
-              <a:rPr lang="en-US" sz="1250" b="1" dirty="0">
+              <a:rPr lang="pt-BR" sz="1250" b="1">
                 <a:solidFill>
                   <a:srgbClr val="FFFFFF"/>
                 </a:solidFill>
@@ -22213,7 +22337,7 @@
                 <a:ea typeface="Calibri" pitchFamily="34" charset="-122"/>
                 <a:cs typeface="Calibri" pitchFamily="34" charset="-120"/>
               </a:rPr>
-              <a:t>História sem critério de aceite preenchido não é contabilizada na entrega da Etapa 1</a:t>
+              <a:t>História sem critério de aceite preenchido ainda não está pronta para entrar em uma sprint</a:t>
             </a:r>
             <a:endParaRPr lang="en-US" sz="1250" dirty="0"/>
           </a:p>
@@ -22343,7 +22467,7 @@
               <a:buNone/>
             </a:pPr>
             <a:r>
-              <a:rPr lang="en-US" sz="1400" dirty="0">
+              <a:rPr lang="pt-BR" sz="1400">
                 <a:solidFill>
                   <a:srgbClr val="5A7184"/>
                 </a:solidFill>
@@ -22351,7 +22475,7 @@
                 <a:ea typeface="Calibri" pitchFamily="34" charset="-122"/>
                 <a:cs typeface="Calibri" pitchFamily="34" charset="-120"/>
               </a:rPr>
-              <a:t>O elo que fecha a cadeia de rastreabilidade</a:t>
+              <a:t>O elo que fecha a cadeia de rastreabilidade — configurado na Atividade de Sprint</a:t>
             </a:r>
             <a:endParaRPr lang="en-US" sz="1400" dirty="0"/>
           </a:p>
@@ -22481,7 +22605,29 @@
                 <a:ea typeface="Consolas" pitchFamily="34" charset="-122"/>
                 <a:cs typeface="Consolas" pitchFamily="34" charset="-120"/>
               </a:rPr>
-              <a:t>Branch no GitHub              feature/1234-sugestao-por-horario
+              <a:t>Branch no </a:t>
+            </a:r>
+            <a:r>
+              <a:rPr lang="en-US" sz="1000">
+                <a:solidFill>
+                  <a:srgbClr val="FFFFFF"/>
+                </a:solidFill>
+                <a:latin typeface="Consolas" pitchFamily="34" charset="0"/>
+                <a:ea typeface="Consolas" pitchFamily="34" charset="-122"/>
+                <a:cs typeface="Consolas" pitchFamily="34" charset="-120"/>
+              </a:rPr>
+              <a:t>GitHub              feat/AB1234-sugestao-por-horario</a:t>
+            </a:r>
+            <a:r>
+              <a:rPr lang="en-US" sz="1000" dirty="0">
+                <a:solidFill>
+                  <a:srgbClr val="FFFFFF"/>
+                </a:solidFill>
+                <a:latin typeface="Consolas" pitchFamily="34" charset="0"/>
+                <a:ea typeface="Consolas" pitchFamily="34" charset="-122"/>
+                <a:cs typeface="Consolas" pitchFamily="34" charset="-120"/>
+              </a:rPr>
+              <a:t>
 Mensagem de commit            feat(grupos): sugerir por horário  </a:t>
             </a:r>
             <a:r>
@@ -22636,7 +22782,7 @@
               <a:buNone/>
             </a:pPr>
             <a:r>
-              <a:rPr lang="en-US" sz="1250" b="1" dirty="0">
+              <a:rPr lang="pt-BR" sz="1250" b="1">
                 <a:solidFill>
                   <a:srgbClr val="334155"/>
                 </a:solidFill>
@@ -22644,7 +22790,7 @@
                 <a:ea typeface="Calibri" pitchFamily="34" charset="-122"/>
                 <a:cs typeface="Calibri" pitchFamily="34" charset="-120"/>
               </a:rPr>
-              <a:t>Instalar a integração</a:t>
+              <a:t>Conectar, na Atividade de Sprint</a:t>
             </a:r>
             <a:endParaRPr lang="en-US" sz="1250" dirty="0"/>
           </a:p>
@@ -22675,7 +22821,7 @@
               <a:buNone/>
             </a:pPr>
             <a:r>
-              <a:rPr lang="en-US" sz="1050" dirty="0">
+              <a:rPr lang="pt-BR" sz="1050">
                 <a:solidFill>
                   <a:srgbClr val="5A7184"/>
                 </a:solidFill>
@@ -22683,7 +22829,7 @@
                 <a:ea typeface="Calibri" pitchFamily="34" charset="-122"/>
                 <a:cs typeface="Calibri" pitchFamily="34" charset="-120"/>
               </a:rPr>
-              <a:t>Conectar a organização do Azure Boards ao repositório da equipe no GitHub</a:t>
+              <a:t>A equipe cria a organização e o repositório no GitHub e os conecta ao Azure Boards</a:t>
             </a:r>
             <a:endParaRPr lang="en-US" sz="1050" dirty="0"/>
           </a:p>
@@ -23237,7 +23383,7 @@
               <a:buNone/>
             </a:pPr>
             <a:r>
-              <a:rPr lang="en-US" sz="1300" dirty="0">
+              <a:rPr lang="pt-BR" sz="1300">
                 <a:solidFill>
                   <a:srgbClr val="FFFFFF"/>
                 </a:solidFill>
@@ -23245,7 +23391,7 @@
                 <a:ea typeface="Calibri" pitchFamily="34" charset="-122"/>
                 <a:cs typeface="Calibri" pitchFamily="34" charset="-120"/>
               </a:rPr>
-              <a:t>Formar a equipe de quatro a cinco integrantes e receber o número com o docente</a:t>
+              <a:t>Formar a equipe de quatro a cinco integrantes e escolher o nome da equipe</a:t>
             </a:r>
             <a:endParaRPr lang="en-US" sz="1300" dirty="0"/>
           </a:p>
@@ -23451,7 +23597,7 @@
               <a:buNone/>
             </a:pPr>
             <a:r>
-              <a:rPr lang="en-US" sz="1300" dirty="0">
+              <a:rPr lang="pt-BR" sz="1300">
                 <a:solidFill>
                   <a:srgbClr val="FFFFFF"/>
                 </a:solidFill>
@@ -23459,7 +23605,7 @@
                 <a:ea typeface="Calibri" pitchFamily="34" charset="-122"/>
                 <a:cs typeface="Calibri" pitchFamily="34" charset="-120"/>
               </a:rPr>
-              <a:t>Criar o projeto Connexa com o processo Agile e adicionar o docente</a:t>
+              <a:t>Criar o projeto Connexa com o processo Agile e adicionar o docente como Stakeholder</a:t>
             </a:r>
             <a:endParaRPr lang="en-US" sz="1300" dirty="0"/>
           </a:p>
@@ -23558,7 +23704,7 @@
               <a:buNone/>
             </a:pPr>
             <a:r>
-              <a:rPr lang="en-US" sz="1300" dirty="0">
+              <a:rPr lang="pt-BR" sz="1300">
                 <a:solidFill>
                   <a:srgbClr val="FFFFFF"/>
                 </a:solidFill>
@@ -23566,7 +23712,7 @@
                 <a:ea typeface="Calibri" pitchFamily="34" charset="-122"/>
                 <a:cs typeface="Calibri" pitchFamily="34" charset="-120"/>
               </a:rPr>
-              <a:t>Criar o repositório no GitHub, no padrão de nomes, e conectá-lo ao Boards</a:t>
+              <a:t>Conferir em Organization settings › Microsoft Entra que a organização está ligada à instituição</a:t>
             </a:r>
             <a:endParaRPr lang="en-US" sz="1300" dirty="0"/>
           </a:p>
